--- a/figures.pptx
+++ b/figures.pptx
@@ -7,6 +7,7 @@
   <p:sldIdLst>
     <p:sldId id="256" r:id="rId2"/>
     <p:sldId id="257" r:id="rId3"/>
+    <p:sldId id="258" r:id="rId4"/>
   </p:sldIdLst>
   <p:sldSz cx="12192000" cy="6858000"/>
   <p:notesSz cx="6858000" cy="9144000"/>
@@ -105,6 +106,11 @@
       </a:defRPr>
     </a:lvl9pPr>
   </p:defaultTextStyle>
+  <p:extLst>
+    <p:ext uri="{EFAFB233-063F-42B5-8137-9DF3F51BA10A}">
+      <p15:sldGuideLst xmlns:p15="http://schemas.microsoft.com/office/powerpoint/2012/main"/>
+    </p:ext>
+  </p:extLst>
 </p:presentation>
 </file>
 
@@ -257,7 +263,7 @@
           <a:p>
             <a:fld id="{4C7CD7DF-6172-4688-BB16-5EFDD80F3786}" type="datetimeFigureOut">
               <a:rPr lang="hu-HU" smtClean="0"/>
-              <a:t>2026. 04. 29.</a:t>
+              <a:t>2026. 05. 26.</a:t>
             </a:fld>
             <a:endParaRPr lang="hu-HU"/>
           </a:p>
@@ -457,7 +463,7 @@
           <a:p>
             <a:fld id="{4C7CD7DF-6172-4688-BB16-5EFDD80F3786}" type="datetimeFigureOut">
               <a:rPr lang="hu-HU" smtClean="0"/>
-              <a:t>2026. 04. 29.</a:t>
+              <a:t>2026. 05. 26.</a:t>
             </a:fld>
             <a:endParaRPr lang="hu-HU"/>
           </a:p>
@@ -667,7 +673,7 @@
           <a:p>
             <a:fld id="{4C7CD7DF-6172-4688-BB16-5EFDD80F3786}" type="datetimeFigureOut">
               <a:rPr lang="hu-HU" smtClean="0"/>
-              <a:t>2026. 04. 29.</a:t>
+              <a:t>2026. 05. 26.</a:t>
             </a:fld>
             <a:endParaRPr lang="hu-HU"/>
           </a:p>
@@ -867,7 +873,7 @@
           <a:p>
             <a:fld id="{4C7CD7DF-6172-4688-BB16-5EFDD80F3786}" type="datetimeFigureOut">
               <a:rPr lang="hu-HU" smtClean="0"/>
-              <a:t>2026. 04. 29.</a:t>
+              <a:t>2026. 05. 26.</a:t>
             </a:fld>
             <a:endParaRPr lang="hu-HU"/>
           </a:p>
@@ -1143,7 +1149,7 @@
           <a:p>
             <a:fld id="{4C7CD7DF-6172-4688-BB16-5EFDD80F3786}" type="datetimeFigureOut">
               <a:rPr lang="hu-HU" smtClean="0"/>
-              <a:t>2026. 04. 29.</a:t>
+              <a:t>2026. 05. 26.</a:t>
             </a:fld>
             <a:endParaRPr lang="hu-HU"/>
           </a:p>
@@ -1411,7 +1417,7 @@
           <a:p>
             <a:fld id="{4C7CD7DF-6172-4688-BB16-5EFDD80F3786}" type="datetimeFigureOut">
               <a:rPr lang="hu-HU" smtClean="0"/>
-              <a:t>2026. 04. 29.</a:t>
+              <a:t>2026. 05. 26.</a:t>
             </a:fld>
             <a:endParaRPr lang="hu-HU"/>
           </a:p>
@@ -1826,7 +1832,7 @@
           <a:p>
             <a:fld id="{4C7CD7DF-6172-4688-BB16-5EFDD80F3786}" type="datetimeFigureOut">
               <a:rPr lang="hu-HU" smtClean="0"/>
-              <a:t>2026. 04. 29.</a:t>
+              <a:t>2026. 05. 26.</a:t>
             </a:fld>
             <a:endParaRPr lang="hu-HU"/>
           </a:p>
@@ -1968,7 +1974,7 @@
           <a:p>
             <a:fld id="{4C7CD7DF-6172-4688-BB16-5EFDD80F3786}" type="datetimeFigureOut">
               <a:rPr lang="hu-HU" smtClean="0"/>
-              <a:t>2026. 04. 29.</a:t>
+              <a:t>2026. 05. 26.</a:t>
             </a:fld>
             <a:endParaRPr lang="hu-HU"/>
           </a:p>
@@ -2081,7 +2087,7 @@
           <a:p>
             <a:fld id="{4C7CD7DF-6172-4688-BB16-5EFDD80F3786}" type="datetimeFigureOut">
               <a:rPr lang="hu-HU" smtClean="0"/>
-              <a:t>2026. 04. 29.</a:t>
+              <a:t>2026. 05. 26.</a:t>
             </a:fld>
             <a:endParaRPr lang="hu-HU"/>
           </a:p>
@@ -2394,7 +2400,7 @@
           <a:p>
             <a:fld id="{4C7CD7DF-6172-4688-BB16-5EFDD80F3786}" type="datetimeFigureOut">
               <a:rPr lang="hu-HU" smtClean="0"/>
-              <a:t>2026. 04. 29.</a:t>
+              <a:t>2026. 05. 26.</a:t>
             </a:fld>
             <a:endParaRPr lang="hu-HU"/>
           </a:p>
@@ -2683,7 +2689,7 @@
           <a:p>
             <a:fld id="{4C7CD7DF-6172-4688-BB16-5EFDD80F3786}" type="datetimeFigureOut">
               <a:rPr lang="hu-HU" smtClean="0"/>
-              <a:t>2026. 04. 29.</a:t>
+              <a:t>2026. 05. 26.</a:t>
             </a:fld>
             <a:endParaRPr lang="hu-HU"/>
           </a:p>
@@ -2926,7 +2932,7 @@
           <a:p>
             <a:fld id="{4C7CD7DF-6172-4688-BB16-5EFDD80F3786}" type="datetimeFigureOut">
               <a:rPr lang="hu-HU" smtClean="0"/>
-              <a:t>2026. 04. 29.</a:t>
+              <a:t>2026. 05. 26.</a:t>
             </a:fld>
             <a:endParaRPr lang="hu-HU"/>
           </a:p>
@@ -3460,10 +3466,34 @@
           <a:lstStyle/>
           <a:p>
             <a:r>
-              <a:rPr lang="hu-HU" dirty="0" err="1"/>
+              <a:rPr lang="en-US" noProof="0" dirty="0"/>
               <a:t>Flowchart</a:t>
             </a:r>
-            <a:endParaRPr lang="hu-HU" dirty="0"/>
+            <a:r>
+              <a:rPr lang="hu-HU" noProof="0" dirty="0"/>
+              <a:t> – </a:t>
+            </a:r>
+            <a:r>
+              <a:rPr lang="hu-HU" noProof="0" dirty="0" err="1"/>
+              <a:t>according</a:t>
+            </a:r>
+            <a:r>
+              <a:rPr lang="hu-HU" noProof="0" dirty="0"/>
+              <a:t> </a:t>
+            </a:r>
+            <a:r>
+              <a:rPr lang="hu-HU" noProof="0" dirty="0" err="1"/>
+              <a:t>to</a:t>
+            </a:r>
+            <a:r>
+              <a:rPr lang="hu-HU" noProof="0" dirty="0"/>
+              <a:t> </a:t>
+            </a:r>
+            <a:r>
+              <a:rPr lang="da-DK" dirty="0"/>
+              <a:t>Skriabine S. et al 2026.</a:t>
+            </a:r>
+            <a:endParaRPr lang="en-US" noProof="0" dirty="0"/>
           </a:p>
         </p:txBody>
       </p:sp>
@@ -3513,12 +3543,8 @@
           <a:p>
             <a:pPr algn="ctr"/>
             <a:r>
-              <a:rPr lang="hu-HU" dirty="0" err="1"/>
-              <a:t>Stimulus</a:t>
-            </a:r>
-            <a:r>
-              <a:rPr lang="hu-HU" dirty="0"/>
-              <a:t> video displayed</a:t>
+              <a:rPr lang="en-US" noProof="0" dirty="0"/>
+              <a:t>Stimulus video displayed</a:t>
             </a:r>
           </a:p>
         </p:txBody>
@@ -3569,58 +3595,9 @@
           <a:p>
             <a:pPr algn="ctr"/>
             <a:r>
-              <a:rPr lang="hu-HU" dirty="0" err="1"/>
-              <a:t>Measured</a:t>
-            </a:r>
-            <a:r>
-              <a:rPr lang="hu-HU" dirty="0"/>
-              <a:t> </a:t>
-            </a:r>
-            <a:r>
-              <a:rPr lang="hu-HU" dirty="0" err="1"/>
-              <a:t>data</a:t>
-            </a:r>
-            <a:r>
-              <a:rPr lang="hu-HU" dirty="0"/>
-              <a:t> </a:t>
-            </a:r>
-            <a:r>
-              <a:rPr lang="hu-HU" dirty="0" err="1"/>
-              <a:t>decomposed</a:t>
-            </a:r>
-            <a:r>
-              <a:rPr lang="hu-HU" dirty="0"/>
-              <a:t> </a:t>
-            </a:r>
-            <a:r>
-              <a:rPr lang="hu-HU" dirty="0" err="1"/>
-              <a:t>to</a:t>
-            </a:r>
-            <a:r>
-              <a:rPr lang="hu-HU" dirty="0"/>
-              <a:t> </a:t>
-            </a:r>
-            <a:r>
-              <a:rPr lang="hu-HU" dirty="0" err="1"/>
-              <a:t>individual</a:t>
-            </a:r>
-            <a:r>
-              <a:rPr lang="hu-HU" dirty="0"/>
-              <a:t> </a:t>
-            </a:r>
-            <a:r>
-              <a:rPr lang="hu-HU" dirty="0" err="1"/>
-              <a:t>units</a:t>
-            </a:r>
-            <a:r>
-              <a:rPr lang="hu-HU" dirty="0"/>
-              <a:t>/</a:t>
-            </a:r>
-            <a:r>
-              <a:rPr lang="hu-HU" dirty="0" err="1"/>
-              <a:t>cells</a:t>
-            </a:r>
-            <a:endParaRPr lang="hu-HU" dirty="0"/>
+              <a:rPr lang="en-US" noProof="0" dirty="0"/>
+              <a:t>Measured data decomposed to individual units/cells</a:t>
+            </a:r>
           </a:p>
         </p:txBody>
       </p:sp>
@@ -3755,98 +3732,16 @@
           <a:p>
             <a:pPr algn="ctr"/>
             <a:r>
-              <a:rPr lang="hu-HU" dirty="0" err="1"/>
-              <a:t>Align</a:t>
-            </a:r>
-            <a:r>
-              <a:rPr lang="hu-HU" dirty="0"/>
-              <a:t> and </a:t>
-            </a:r>
-            <a:r>
-              <a:rPr lang="hu-HU" dirty="0" err="1"/>
-              <a:t>crop</a:t>
-            </a:r>
-            <a:r>
-              <a:rPr lang="hu-HU" dirty="0"/>
-              <a:t> </a:t>
-            </a:r>
-            <a:r>
-              <a:rPr lang="hu-HU" dirty="0" err="1"/>
-              <a:t>to</a:t>
-            </a:r>
-            <a:r>
-              <a:rPr lang="hu-HU" dirty="0"/>
-              <a:t> </a:t>
-            </a:r>
-            <a:r>
-              <a:rPr lang="hu-HU" dirty="0" err="1"/>
-              <a:t>the</a:t>
-            </a:r>
-            <a:r>
-              <a:rPr lang="hu-HU" dirty="0"/>
-              <a:t> </a:t>
-            </a:r>
-            <a:r>
-              <a:rPr lang="hu-HU" dirty="0" err="1"/>
-              <a:t>useful</a:t>
-            </a:r>
-            <a:r>
-              <a:rPr lang="hu-HU" dirty="0"/>
-              <a:t> </a:t>
-            </a:r>
-            <a:r>
-              <a:rPr lang="hu-HU" dirty="0" err="1"/>
-              <a:t>time</a:t>
-            </a:r>
-            <a:r>
-              <a:rPr lang="hu-HU" dirty="0"/>
-              <a:t> </a:t>
-            </a:r>
-            <a:r>
-              <a:rPr lang="hu-HU" dirty="0" err="1"/>
-              <a:t>intervals</a:t>
-            </a:r>
-            <a:endParaRPr lang="hu-HU" dirty="0"/>
+              <a:rPr lang="en-US" noProof="0" dirty="0"/>
+              <a:t>Align and crop to the useful time intervals</a:t>
+            </a:r>
           </a:p>
           <a:p>
             <a:pPr algn="ctr"/>
             <a:r>
-              <a:rPr lang="hu-HU" dirty="0" err="1"/>
-              <a:t>Resample</a:t>
-            </a:r>
-            <a:r>
-              <a:rPr lang="hu-HU" dirty="0"/>
-              <a:t> </a:t>
-            </a:r>
-            <a:r>
-              <a:rPr lang="hu-HU" dirty="0" err="1"/>
-              <a:t>to</a:t>
-            </a:r>
-            <a:r>
-              <a:rPr lang="hu-HU" dirty="0"/>
-              <a:t> </a:t>
-            </a:r>
-            <a:r>
-              <a:rPr lang="hu-HU" dirty="0" err="1"/>
-              <a:t>the</a:t>
-            </a:r>
-            <a:r>
-              <a:rPr lang="hu-HU" dirty="0"/>
-              <a:t> </a:t>
-            </a:r>
-            <a:r>
-              <a:rPr lang="hu-HU" dirty="0" err="1"/>
-              <a:t>same</a:t>
-            </a:r>
-            <a:r>
-              <a:rPr lang="hu-HU" dirty="0"/>
-              <a:t> </a:t>
-            </a:r>
-            <a:r>
-              <a:rPr lang="hu-HU" dirty="0" err="1"/>
-              <a:t>timesteps</a:t>
-            </a:r>
-            <a:endParaRPr lang="hu-HU" dirty="0"/>
+              <a:rPr lang="en-US" noProof="0" dirty="0"/>
+              <a:t>Resample to the same timesteps</a:t>
+            </a:r>
           </a:p>
         </p:txBody>
       </p:sp>
@@ -3879,7 +3774,7 @@
           <a:lstStyle/>
           <a:p>
             <a:r>
-              <a:rPr lang="hu-HU" dirty="0"/>
+              <a:rPr lang="en-US" noProof="0" dirty="0"/>
               <a:t>DIY</a:t>
             </a:r>
           </a:p>
@@ -3914,7 +3809,7 @@
           <a:lstStyle/>
           <a:p>
             <a:r>
-              <a:rPr lang="hu-HU" dirty="0"/>
+              <a:rPr lang="en-US" noProof="0" dirty="0"/>
               <a:t>DIY</a:t>
             </a:r>
           </a:p>
@@ -3961,34 +3856,9 @@
           <a:p>
             <a:pPr algn="ctr"/>
             <a:r>
-              <a:rPr lang="hu-HU" dirty="0" err="1"/>
-              <a:t>Define</a:t>
-            </a:r>
-            <a:r>
-              <a:rPr lang="hu-HU" dirty="0"/>
-              <a:t> </a:t>
-            </a:r>
-            <a:r>
-              <a:rPr lang="hu-HU" dirty="0" err="1"/>
-              <a:t>analysis</a:t>
-            </a:r>
-            <a:r>
-              <a:rPr lang="hu-HU" dirty="0"/>
-              <a:t>/</a:t>
-            </a:r>
-            <a:r>
-              <a:rPr lang="hu-HU" dirty="0" err="1"/>
-              <a:t>library</a:t>
-            </a:r>
-            <a:r>
-              <a:rPr lang="hu-HU" dirty="0"/>
-              <a:t> </a:t>
-            </a:r>
-            <a:r>
-              <a:rPr lang="hu-HU" dirty="0" err="1"/>
-              <a:t>parameters</a:t>
-            </a:r>
-            <a:endParaRPr lang="hu-HU" dirty="0"/>
+              <a:rPr lang="en-US" noProof="0" dirty="0"/>
+              <a:t>Define analysis/library parameters</a:t>
+            </a:r>
           </a:p>
         </p:txBody>
       </p:sp>
@@ -4076,18 +3946,9 @@
           <a:p>
             <a:pPr algn="ctr"/>
             <a:r>
-              <a:rPr lang="hu-HU" dirty="0" err="1"/>
-              <a:t>Generate</a:t>
-            </a:r>
-            <a:r>
-              <a:rPr lang="hu-HU" dirty="0"/>
-              <a:t> </a:t>
-            </a:r>
-            <a:r>
-              <a:rPr lang="hu-HU" dirty="0" err="1"/>
-              <a:t>library</a:t>
-            </a:r>
-            <a:endParaRPr lang="hu-HU" dirty="0"/>
+              <a:rPr lang="en-US" noProof="0" dirty="0"/>
+              <a:t>Generate library</a:t>
+            </a:r>
           </a:p>
         </p:txBody>
       </p:sp>
@@ -4132,26 +3993,14 @@
           <a:p>
             <a:pPr algn="ctr"/>
             <a:r>
-              <a:rPr lang="hu-HU" dirty="0" err="1"/>
-              <a:t>Spatial</a:t>
-            </a:r>
-            <a:r>
-              <a:rPr lang="hu-HU" dirty="0"/>
-              <a:t> </a:t>
-            </a:r>
-            <a:r>
-              <a:rPr lang="hu-HU" dirty="0" err="1"/>
-              <a:t>crop</a:t>
-            </a:r>
-            <a:r>
-              <a:rPr lang="hu-HU" dirty="0"/>
-              <a:t> and </a:t>
-            </a:r>
-            <a:r>
-              <a:rPr lang="hu-HU" dirty="0" err="1"/>
+              <a:rPr lang="en-US" noProof="0" dirty="0"/>
+              <a:t>Spatial crop and </a:t>
+            </a:r>
+            <a:r>
+              <a:rPr lang="en-US" noProof="0" dirty="0" err="1"/>
               <a:t>downsample</a:t>
             </a:r>
-            <a:endParaRPr lang="hu-HU" dirty="0"/>
+            <a:endParaRPr lang="en-US" noProof="0" dirty="0"/>
           </a:p>
         </p:txBody>
       </p:sp>
@@ -4238,18 +4087,9 @@
           <a:p>
             <a:pPr algn="ctr"/>
             <a:r>
-              <a:rPr lang="hu-HU" dirty="0" err="1"/>
-              <a:t>Gabor</a:t>
-            </a:r>
-            <a:r>
-              <a:rPr lang="hu-HU" dirty="0"/>
-              <a:t> </a:t>
-            </a:r>
-            <a:r>
-              <a:rPr lang="hu-HU" dirty="0" err="1"/>
-              <a:t>decompose</a:t>
-            </a:r>
-            <a:endParaRPr lang="hu-HU" dirty="0"/>
+              <a:rPr lang="en-US" noProof="0" dirty="0"/>
+              <a:t>Gabor decompose</a:t>
+            </a:r>
           </a:p>
         </p:txBody>
       </p:sp>
@@ -4378,34 +4218,9 @@
           <a:p>
             <a:pPr algn="ctr"/>
             <a:r>
-              <a:rPr lang="hu-HU" dirty="0" err="1"/>
-              <a:t>Correlate</a:t>
-            </a:r>
-            <a:r>
-              <a:rPr lang="hu-HU" dirty="0"/>
-              <a:t> and </a:t>
-            </a:r>
-            <a:r>
-              <a:rPr lang="hu-HU" dirty="0" err="1"/>
-              <a:t>calculate</a:t>
-            </a:r>
-            <a:r>
-              <a:rPr lang="hu-HU" dirty="0"/>
-              <a:t> </a:t>
-            </a:r>
-            <a:r>
-              <a:rPr lang="hu-HU" dirty="0" err="1"/>
-              <a:t>tuning</a:t>
-            </a:r>
-            <a:r>
-              <a:rPr lang="hu-HU" dirty="0"/>
-              <a:t> </a:t>
-            </a:r>
-            <a:r>
-              <a:rPr lang="hu-HU" dirty="0" err="1"/>
-              <a:t>curves</a:t>
-            </a:r>
-            <a:endParaRPr lang="hu-HU" dirty="0"/>
+              <a:rPr lang="en-US" noProof="0" dirty="0"/>
+              <a:t>Correlate and calculate tuning curves</a:t>
+            </a:r>
           </a:p>
         </p:txBody>
       </p:sp>
@@ -4492,14 +4307,14 @@
           <a:p>
             <a:pPr algn="ctr"/>
             <a:r>
-              <a:rPr lang="hu-HU" dirty="0"/>
-              <a:t>Display and </a:t>
-            </a:r>
-            <a:r>
-              <a:rPr lang="hu-HU" dirty="0" err="1"/>
-              <a:t>verify</a:t>
-            </a:r>
-            <a:endParaRPr lang="hu-HU" dirty="0"/>
+              <a:rPr lang="hu-HU" noProof="0" dirty="0" err="1"/>
+              <a:t>Full</a:t>
+            </a:r>
+            <a:r>
+              <a:rPr lang="hu-HU" noProof="0" dirty="0"/>
+              <a:t> modell fit</a:t>
+            </a:r>
+            <a:endParaRPr lang="en-US" noProof="0" dirty="0"/>
           </a:p>
         </p:txBody>
       </p:sp>
@@ -4592,7 +4407,7 @@
           <a:lstStyle/>
           <a:p>
             <a:pPr algn="ctr"/>
-            <a:endParaRPr lang="hu-HU">
+            <a:endParaRPr lang="en-US" noProof="0" dirty="0">
               <a:solidFill>
                 <a:schemeClr val="tx1">
                   <a:lumMod val="65000"/>
@@ -4639,7 +4454,7 @@
           <a:lstStyle/>
           <a:p>
             <a:r>
-              <a:rPr lang="hu-HU" dirty="0" err="1">
+              <a:rPr lang="en-US" noProof="0" dirty="0">
                 <a:solidFill>
                   <a:schemeClr val="tx1">
                     <a:lumMod val="65000"/>
@@ -4647,40 +4462,7 @@
                   </a:schemeClr>
                 </a:solidFill>
               </a:rPr>
-              <a:t>Run</a:t>
-            </a:r>
-            <a:r>
-              <a:rPr lang="hu-HU" dirty="0">
-                <a:solidFill>
-                  <a:schemeClr val="tx1">
-                    <a:lumMod val="65000"/>
-                    <a:lumOff val="35000"/>
-                  </a:schemeClr>
-                </a:solidFill>
-              </a:rPr>
-              <a:t> and </a:t>
-            </a:r>
-            <a:r>
-              <a:rPr lang="hu-HU" dirty="0" err="1">
-                <a:solidFill>
-                  <a:schemeClr val="tx1">
-                    <a:lumMod val="65000"/>
-                    <a:lumOff val="35000"/>
-                  </a:schemeClr>
-                </a:solidFill>
-              </a:rPr>
-              <a:t>store</a:t>
-            </a:r>
-            <a:r>
-              <a:rPr lang="hu-HU" dirty="0">
-                <a:solidFill>
-                  <a:schemeClr val="tx1">
-                    <a:lumMod val="65000"/>
-                    <a:lumOff val="35000"/>
-                  </a:schemeClr>
-                </a:solidFill>
-              </a:rPr>
-              <a:t> per video</a:t>
+              <a:t>Run and store per video</a:t>
             </a:r>
           </a:p>
         </p:txBody>
@@ -4732,7 +4514,7 @@
           <a:lstStyle/>
           <a:p>
             <a:pPr algn="ctr"/>
-            <a:endParaRPr lang="hu-HU">
+            <a:endParaRPr lang="en-US" noProof="0" dirty="0">
               <a:solidFill>
                 <a:schemeClr val="tx1">
                   <a:lumMod val="65000"/>
@@ -4779,7 +4561,7 @@
           <a:lstStyle/>
           <a:p>
             <a:r>
-              <a:rPr lang="hu-HU" dirty="0" err="1">
+              <a:rPr lang="en-US" noProof="0" dirty="0">
                 <a:solidFill>
                   <a:schemeClr val="tx1">
                     <a:lumMod val="65000"/>
@@ -4787,10 +4569,1226 @@
                   </a:schemeClr>
                 </a:solidFill>
               </a:rPr>
-              <a:t>Run</a:t>
-            </a:r>
-            <a:r>
-              <a:rPr lang="hu-HU" dirty="0">
+              <a:t>Run per measurement</a:t>
+            </a:r>
+          </a:p>
+        </p:txBody>
+      </p:sp>
+      <p:sp>
+        <p:nvSpPr>
+          <p:cNvPr id="6" name="TextBox 5">
+            <a:extLst>
+              <a:ext uri="{FF2B5EF4-FFF2-40B4-BE49-F238E27FC236}">
+                <a16:creationId xmlns:a16="http://schemas.microsoft.com/office/drawing/2014/main" id="{F60095EC-3C6A-46AC-FFBB-DD18C6C6C64F}"/>
+              </a:ext>
+            </a:extLst>
+          </p:cNvPr>
+          <p:cNvSpPr txBox="1"/>
+          <p:nvPr/>
+        </p:nvSpPr>
+        <p:spPr>
+          <a:xfrm>
+            <a:off x="0" y="3248379"/>
+            <a:ext cx="2152649" cy="276999"/>
+          </a:xfrm>
+          <a:prstGeom prst="rect">
+            <a:avLst/>
+          </a:prstGeom>
+          <a:noFill/>
+        </p:spPr>
+        <p:txBody>
+          <a:bodyPr wrap="square">
+            <a:spAutoFit/>
+          </a:bodyPr>
+          <a:lstStyle/>
+          <a:p>
+            <a:r>
+              <a:rPr lang="hu-HU" sz="1200" dirty="0"/>
+              <a:t>1_gabor_test.ipynb</a:t>
+            </a:r>
+          </a:p>
+        </p:txBody>
+      </p:sp>
+      <p:sp>
+        <p:nvSpPr>
+          <p:cNvPr id="9" name="TextBox 8">
+            <a:extLst>
+              <a:ext uri="{FF2B5EF4-FFF2-40B4-BE49-F238E27FC236}">
+                <a16:creationId xmlns:a16="http://schemas.microsoft.com/office/drawing/2014/main" id="{0B011B4C-9BFF-4879-1EC7-F49CAB9B7CC9}"/>
+              </a:ext>
+            </a:extLst>
+          </p:cNvPr>
+          <p:cNvSpPr txBox="1"/>
+          <p:nvPr/>
+        </p:nvSpPr>
+        <p:spPr>
+          <a:xfrm>
+            <a:off x="-1" y="4042118"/>
+            <a:ext cx="2476501" cy="276999"/>
+          </a:xfrm>
+          <a:prstGeom prst="rect">
+            <a:avLst/>
+          </a:prstGeom>
+          <a:noFill/>
+        </p:spPr>
+        <p:txBody>
+          <a:bodyPr wrap="square">
+            <a:spAutoFit/>
+          </a:bodyPr>
+          <a:lstStyle/>
+          <a:p>
+            <a:r>
+              <a:rPr lang="en-US" sz="1200" dirty="0"/>
+              <a:t>2_gabor_library_generation.ipynb</a:t>
+            </a:r>
+            <a:endParaRPr lang="hu-HU" sz="1200" dirty="0"/>
+          </a:p>
+        </p:txBody>
+      </p:sp>
+      <p:sp>
+        <p:nvSpPr>
+          <p:cNvPr id="14" name="TextBox 13">
+            <a:extLst>
+              <a:ext uri="{FF2B5EF4-FFF2-40B4-BE49-F238E27FC236}">
+                <a16:creationId xmlns:a16="http://schemas.microsoft.com/office/drawing/2014/main" id="{D91173D9-8179-5969-1290-8DAA632A8C3C}"/>
+              </a:ext>
+            </a:extLst>
+          </p:cNvPr>
+          <p:cNvSpPr txBox="1"/>
+          <p:nvPr/>
+        </p:nvSpPr>
+        <p:spPr>
+          <a:xfrm>
+            <a:off x="3452307" y="4501215"/>
+            <a:ext cx="2091239" cy="261610"/>
+          </a:xfrm>
+          <a:prstGeom prst="rect">
+            <a:avLst/>
+          </a:prstGeom>
+          <a:noFill/>
+        </p:spPr>
+        <p:txBody>
+          <a:bodyPr wrap="square">
+            <a:spAutoFit/>
+          </a:bodyPr>
+          <a:lstStyle/>
+          <a:p>
+            <a:r>
+              <a:rPr lang="hu-HU" sz="1100" dirty="0"/>
+              <a:t>3_video_decomposition.ipynb</a:t>
+            </a:r>
+          </a:p>
+        </p:txBody>
+      </p:sp>
+      <p:sp>
+        <p:nvSpPr>
+          <p:cNvPr id="20" name="TextBox 19">
+            <a:extLst>
+              <a:ext uri="{FF2B5EF4-FFF2-40B4-BE49-F238E27FC236}">
+                <a16:creationId xmlns:a16="http://schemas.microsoft.com/office/drawing/2014/main" id="{639B777D-8D04-3C67-59E7-3EC54C20B593}"/>
+              </a:ext>
+            </a:extLst>
+          </p:cNvPr>
+          <p:cNvSpPr txBox="1"/>
+          <p:nvPr/>
+        </p:nvSpPr>
+        <p:spPr>
+          <a:xfrm>
+            <a:off x="9189243" y="4042118"/>
+            <a:ext cx="2897982" cy="261610"/>
+          </a:xfrm>
+          <a:prstGeom prst="rect">
+            <a:avLst/>
+          </a:prstGeom>
+          <a:noFill/>
+        </p:spPr>
+        <p:txBody>
+          <a:bodyPr wrap="square">
+            <a:spAutoFit/>
+          </a:bodyPr>
+          <a:lstStyle/>
+          <a:p>
+            <a:r>
+              <a:rPr lang="hu-HU" sz="1100" dirty="0"/>
+              <a:t>4_simple_feature_estimation_test.ipynb</a:t>
+            </a:r>
+          </a:p>
+        </p:txBody>
+      </p:sp>
+      <p:sp>
+        <p:nvSpPr>
+          <p:cNvPr id="23" name="TextBox 22">
+            <a:extLst>
+              <a:ext uri="{FF2B5EF4-FFF2-40B4-BE49-F238E27FC236}">
+                <a16:creationId xmlns:a16="http://schemas.microsoft.com/office/drawing/2014/main" id="{9409DCD1-B441-5D37-5F24-01C39514CB69}"/>
+              </a:ext>
+            </a:extLst>
+          </p:cNvPr>
+          <p:cNvSpPr txBox="1"/>
+          <p:nvPr/>
+        </p:nvSpPr>
+        <p:spPr>
+          <a:xfrm>
+            <a:off x="9189243" y="4658156"/>
+            <a:ext cx="2781300" cy="430887"/>
+          </a:xfrm>
+          <a:prstGeom prst="rect">
+            <a:avLst/>
+          </a:prstGeom>
+          <a:noFill/>
+        </p:spPr>
+        <p:txBody>
+          <a:bodyPr wrap="square">
+            <a:spAutoFit/>
+          </a:bodyPr>
+          <a:lstStyle/>
+          <a:p>
+            <a:r>
+              <a:rPr lang="hu-HU" sz="1100" dirty="0"/>
+              <a:t>5_complex_feature_estimation_test.ipynb</a:t>
+            </a:r>
+          </a:p>
+          <a:p>
+            <a:r>
+              <a:rPr lang="hu-HU" sz="1100" dirty="0"/>
+              <a:t>6_sophie_modell_test.ipynb</a:t>
+            </a:r>
+          </a:p>
+        </p:txBody>
+      </p:sp>
+    </p:spTree>
+    <p:extLst>
+      <p:ext uri="{BB962C8B-B14F-4D97-AF65-F5344CB8AC3E}">
+        <p14:creationId xmlns:p14="http://schemas.microsoft.com/office/powerpoint/2010/main" val="24788606"/>
+      </p:ext>
+    </p:extLst>
+  </p:cSld>
+  <p:clrMapOvr>
+    <a:masterClrMapping/>
+  </p:clrMapOvr>
+</p:sld>
+</file>
+
+<file path=ppt/slides/slide3.xml><?xml version="1.0" encoding="utf-8"?>
+<p:sld xmlns:a="http://schemas.openxmlformats.org/drawingml/2006/main" xmlns:r="http://schemas.openxmlformats.org/officeDocument/2006/relationships" xmlns:p="http://schemas.openxmlformats.org/presentationml/2006/main">
+  <p:cSld>
+    <p:spTree>
+      <p:nvGrpSpPr>
+        <p:cNvPr id="1" name="">
+          <a:extLst>
+            <a:ext uri="{FF2B5EF4-FFF2-40B4-BE49-F238E27FC236}">
+              <a16:creationId xmlns:a16="http://schemas.microsoft.com/office/drawing/2014/main" id="{C9CB1D3A-3EBB-A411-3E86-9BB870DF6D91}"/>
+            </a:ext>
+          </a:extLst>
+        </p:cNvPr>
+        <p:cNvGrpSpPr/>
+        <p:nvPr/>
+      </p:nvGrpSpPr>
+      <p:grpSpPr>
+        <a:xfrm>
+          <a:off x="0" y="0"/>
+          <a:ext cx="0" cy="0"/>
+          <a:chOff x="0" y="0"/>
+          <a:chExt cx="0" cy="0"/>
+        </a:xfrm>
+      </p:grpSpPr>
+      <p:sp>
+        <p:nvSpPr>
+          <p:cNvPr id="2" name="Title 1">
+            <a:extLst>
+              <a:ext uri="{FF2B5EF4-FFF2-40B4-BE49-F238E27FC236}">
+                <a16:creationId xmlns:a16="http://schemas.microsoft.com/office/drawing/2014/main" id="{246ADD8C-F740-9060-DFB7-2ED31CCD4CB4}"/>
+              </a:ext>
+            </a:extLst>
+          </p:cNvPr>
+          <p:cNvSpPr>
+            <a:spLocks noGrp="1"/>
+          </p:cNvSpPr>
+          <p:nvPr>
+            <p:ph type="title"/>
+          </p:nvPr>
+        </p:nvSpPr>
+        <p:spPr>
+          <a:xfrm>
+            <a:off x="838200" y="365126"/>
+            <a:ext cx="10515600" cy="315912"/>
+          </a:xfrm>
+        </p:spPr>
+        <p:txBody>
+          <a:bodyPr>
+            <a:normAutofit fontScale="90000"/>
+          </a:bodyPr>
+          <a:lstStyle/>
+          <a:p>
+            <a:r>
+              <a:rPr lang="en-US" noProof="0" dirty="0"/>
+              <a:t>Flowchart</a:t>
+            </a:r>
+            <a:r>
+              <a:rPr lang="hu-HU" noProof="0" dirty="0"/>
+              <a:t> – </a:t>
+            </a:r>
+            <a:r>
+              <a:rPr lang="hu-HU" noProof="0" dirty="0" err="1"/>
+              <a:t>upgraded</a:t>
+            </a:r>
+            <a:endParaRPr lang="en-US" noProof="0" dirty="0"/>
+          </a:p>
+        </p:txBody>
+      </p:sp>
+      <p:sp>
+        <p:nvSpPr>
+          <p:cNvPr id="4" name="Rectangle 3">
+            <a:extLst>
+              <a:ext uri="{FF2B5EF4-FFF2-40B4-BE49-F238E27FC236}">
+                <a16:creationId xmlns:a16="http://schemas.microsoft.com/office/drawing/2014/main" id="{90F24305-2384-C3EB-5DCC-14515635AFFA}"/>
+              </a:ext>
+            </a:extLst>
+          </p:cNvPr>
+          <p:cNvSpPr/>
+          <p:nvPr/>
+        </p:nvSpPr>
+        <p:spPr>
+          <a:xfrm>
+            <a:off x="3257549" y="1038225"/>
+            <a:ext cx="1781175" cy="628650"/>
+          </a:xfrm>
+          <a:prstGeom prst="rect">
+            <a:avLst/>
+          </a:prstGeom>
+          <a:solidFill>
+            <a:schemeClr val="bg1">
+              <a:lumMod val="95000"/>
+            </a:schemeClr>
+          </a:solidFill>
+        </p:spPr>
+        <p:style>
+          <a:lnRef idx="2">
+            <a:schemeClr val="accent1"/>
+          </a:lnRef>
+          <a:fillRef idx="1">
+            <a:schemeClr val="lt1"/>
+          </a:fillRef>
+          <a:effectRef idx="0">
+            <a:schemeClr val="accent1"/>
+          </a:effectRef>
+          <a:fontRef idx="minor">
+            <a:schemeClr val="dk1"/>
+          </a:fontRef>
+        </p:style>
+        <p:txBody>
+          <a:bodyPr rtlCol="0" anchor="ctr"/>
+          <a:lstStyle/>
+          <a:p>
+            <a:pPr algn="ctr"/>
+            <a:r>
+              <a:rPr lang="en-US" noProof="0" dirty="0"/>
+              <a:t>Stimulus video displayed</a:t>
+            </a:r>
+          </a:p>
+        </p:txBody>
+      </p:sp>
+      <p:sp>
+        <p:nvSpPr>
+          <p:cNvPr id="5" name="Rectangle 4">
+            <a:extLst>
+              <a:ext uri="{FF2B5EF4-FFF2-40B4-BE49-F238E27FC236}">
+                <a16:creationId xmlns:a16="http://schemas.microsoft.com/office/drawing/2014/main" id="{892858C7-E5A0-B21E-6B41-7FDDC8C5230A}"/>
+              </a:ext>
+            </a:extLst>
+          </p:cNvPr>
+          <p:cNvSpPr/>
+          <p:nvPr/>
+        </p:nvSpPr>
+        <p:spPr>
+          <a:xfrm>
+            <a:off x="6581774" y="1038225"/>
+            <a:ext cx="3314701" cy="628650"/>
+          </a:xfrm>
+          <a:prstGeom prst="rect">
+            <a:avLst/>
+          </a:prstGeom>
+          <a:solidFill>
+            <a:schemeClr val="bg1">
+              <a:lumMod val="95000"/>
+            </a:schemeClr>
+          </a:solidFill>
+        </p:spPr>
+        <p:style>
+          <a:lnRef idx="2">
+            <a:schemeClr val="accent1"/>
+          </a:lnRef>
+          <a:fillRef idx="1">
+            <a:schemeClr val="lt1"/>
+          </a:fillRef>
+          <a:effectRef idx="0">
+            <a:schemeClr val="accent1"/>
+          </a:effectRef>
+          <a:fontRef idx="minor">
+            <a:schemeClr val="dk1"/>
+          </a:fontRef>
+        </p:style>
+        <p:txBody>
+          <a:bodyPr rtlCol="0" anchor="ctr"/>
+          <a:lstStyle/>
+          <a:p>
+            <a:pPr algn="ctr"/>
+            <a:r>
+              <a:rPr lang="en-US" noProof="0" dirty="0"/>
+              <a:t>Measured data decomposed to individual units/cells</a:t>
+            </a:r>
+          </a:p>
+        </p:txBody>
+      </p:sp>
+      <p:cxnSp>
+        <p:nvCxnSpPr>
+          <p:cNvPr id="7" name="Straight Arrow Connector 6">
+            <a:extLst>
+              <a:ext uri="{FF2B5EF4-FFF2-40B4-BE49-F238E27FC236}">
+                <a16:creationId xmlns:a16="http://schemas.microsoft.com/office/drawing/2014/main" id="{A54B32CF-D457-DAAD-AFD7-1A5725424B06}"/>
+              </a:ext>
+            </a:extLst>
+          </p:cNvPr>
+          <p:cNvCxnSpPr>
+            <a:cxnSpLocks/>
+            <a:stCxn id="4" idx="2"/>
+          </p:cNvCxnSpPr>
+          <p:nvPr/>
+        </p:nvCxnSpPr>
+        <p:spPr>
+          <a:xfrm flipH="1">
+            <a:off x="4133850" y="1666875"/>
+            <a:ext cx="14287" cy="1262062"/>
+          </a:xfrm>
+          <a:prstGeom prst="straightConnector1">
+            <a:avLst/>
+          </a:prstGeom>
+          <a:ln>
+            <a:tailEnd type="triangle"/>
+          </a:ln>
+        </p:spPr>
+        <p:style>
+          <a:lnRef idx="2">
+            <a:schemeClr val="accent1"/>
+          </a:lnRef>
+          <a:fillRef idx="1">
+            <a:schemeClr val="lt1"/>
+          </a:fillRef>
+          <a:effectRef idx="0">
+            <a:schemeClr val="accent1"/>
+          </a:effectRef>
+          <a:fontRef idx="minor">
+            <a:schemeClr val="dk1"/>
+          </a:fontRef>
+        </p:style>
+      </p:cxnSp>
+      <p:cxnSp>
+        <p:nvCxnSpPr>
+          <p:cNvPr id="11" name="Straight Arrow Connector 10">
+            <a:extLst>
+              <a:ext uri="{FF2B5EF4-FFF2-40B4-BE49-F238E27FC236}">
+                <a16:creationId xmlns:a16="http://schemas.microsoft.com/office/drawing/2014/main" id="{D33395FA-9C42-5D75-0E1D-ED2BBA4EC0C9}"/>
+              </a:ext>
+            </a:extLst>
+          </p:cNvPr>
+          <p:cNvCxnSpPr>
+            <a:cxnSpLocks/>
+            <a:stCxn id="5" idx="2"/>
+            <a:endCxn id="33" idx="0"/>
+          </p:cNvCxnSpPr>
+          <p:nvPr/>
+        </p:nvCxnSpPr>
+        <p:spPr>
+          <a:xfrm>
+            <a:off x="8239125" y="1666875"/>
+            <a:ext cx="19050" cy="2082565"/>
+          </a:xfrm>
+          <a:prstGeom prst="straightConnector1">
+            <a:avLst/>
+          </a:prstGeom>
+          <a:ln>
+            <a:tailEnd type="triangle"/>
+          </a:ln>
+        </p:spPr>
+        <p:style>
+          <a:lnRef idx="2">
+            <a:schemeClr val="accent1"/>
+          </a:lnRef>
+          <a:fillRef idx="0">
+            <a:schemeClr val="accent1"/>
+          </a:fillRef>
+          <a:effectRef idx="1">
+            <a:schemeClr val="accent1"/>
+          </a:effectRef>
+          <a:fontRef idx="minor">
+            <a:schemeClr val="tx1"/>
+          </a:fontRef>
+        </p:style>
+      </p:cxnSp>
+      <p:sp>
+        <p:nvSpPr>
+          <p:cNvPr id="8" name="Rectangle 7">
+            <a:extLst>
+              <a:ext uri="{FF2B5EF4-FFF2-40B4-BE49-F238E27FC236}">
+                <a16:creationId xmlns:a16="http://schemas.microsoft.com/office/drawing/2014/main" id="{F623D99F-A6C1-D2D2-0478-9B2272FD5968}"/>
+              </a:ext>
+            </a:extLst>
+          </p:cNvPr>
+          <p:cNvSpPr/>
+          <p:nvPr/>
+        </p:nvSpPr>
+        <p:spPr>
+          <a:xfrm>
+            <a:off x="3257550" y="1943100"/>
+            <a:ext cx="6638926" cy="628650"/>
+          </a:xfrm>
+          <a:prstGeom prst="rect">
+            <a:avLst/>
+          </a:prstGeom>
+          <a:solidFill>
+            <a:schemeClr val="bg1">
+              <a:lumMod val="95000"/>
+            </a:schemeClr>
+          </a:solidFill>
+        </p:spPr>
+        <p:style>
+          <a:lnRef idx="2">
+            <a:schemeClr val="accent1"/>
+          </a:lnRef>
+          <a:fillRef idx="1">
+            <a:schemeClr val="lt1"/>
+          </a:fillRef>
+          <a:effectRef idx="0">
+            <a:schemeClr val="accent1"/>
+          </a:effectRef>
+          <a:fontRef idx="minor">
+            <a:schemeClr val="dk1"/>
+          </a:fontRef>
+        </p:style>
+        <p:txBody>
+          <a:bodyPr rtlCol="0" anchor="ctr"/>
+          <a:lstStyle/>
+          <a:p>
+            <a:pPr algn="ctr"/>
+            <a:r>
+              <a:rPr lang="en-US" noProof="0" dirty="0"/>
+              <a:t>Align and crop to the useful time intervals</a:t>
+            </a:r>
+          </a:p>
+          <a:p>
+            <a:pPr algn="ctr"/>
+            <a:r>
+              <a:rPr lang="en-US" noProof="0" dirty="0"/>
+              <a:t>Resample to the same timesteps</a:t>
+            </a:r>
+          </a:p>
+        </p:txBody>
+      </p:sp>
+      <p:sp>
+        <p:nvSpPr>
+          <p:cNvPr id="12" name="TextBox 11">
+            <a:extLst>
+              <a:ext uri="{FF2B5EF4-FFF2-40B4-BE49-F238E27FC236}">
+                <a16:creationId xmlns:a16="http://schemas.microsoft.com/office/drawing/2014/main" id="{47E8BA06-BEC9-65D8-76E7-B6FBBF04D481}"/>
+              </a:ext>
+            </a:extLst>
+          </p:cNvPr>
+          <p:cNvSpPr txBox="1"/>
+          <p:nvPr/>
+        </p:nvSpPr>
+        <p:spPr>
+          <a:xfrm>
+            <a:off x="10525125" y="1167884"/>
+            <a:ext cx="527709" cy="369332"/>
+          </a:xfrm>
+          <a:prstGeom prst="rect">
+            <a:avLst/>
+          </a:prstGeom>
+          <a:noFill/>
+        </p:spPr>
+        <p:txBody>
+          <a:bodyPr wrap="none" rtlCol="0">
+            <a:spAutoFit/>
+          </a:bodyPr>
+          <a:lstStyle/>
+          <a:p>
+            <a:r>
+              <a:rPr lang="en-US" noProof="0" dirty="0"/>
+              <a:t>DIY</a:t>
+            </a:r>
+          </a:p>
+        </p:txBody>
+      </p:sp>
+      <p:sp>
+        <p:nvSpPr>
+          <p:cNvPr id="13" name="TextBox 12">
+            <a:extLst>
+              <a:ext uri="{FF2B5EF4-FFF2-40B4-BE49-F238E27FC236}">
+                <a16:creationId xmlns:a16="http://schemas.microsoft.com/office/drawing/2014/main" id="{0248409D-68CD-42EC-BD72-20D686DEAE40}"/>
+              </a:ext>
+            </a:extLst>
+          </p:cNvPr>
+          <p:cNvSpPr txBox="1"/>
+          <p:nvPr/>
+        </p:nvSpPr>
+        <p:spPr>
+          <a:xfrm>
+            <a:off x="10523208" y="2072759"/>
+            <a:ext cx="527709" cy="369332"/>
+          </a:xfrm>
+          <a:prstGeom prst="rect">
+            <a:avLst/>
+          </a:prstGeom>
+          <a:noFill/>
+        </p:spPr>
+        <p:txBody>
+          <a:bodyPr wrap="none" rtlCol="0">
+            <a:spAutoFit/>
+          </a:bodyPr>
+          <a:lstStyle/>
+          <a:p>
+            <a:r>
+              <a:rPr lang="en-US" noProof="0" dirty="0"/>
+              <a:t>DIY</a:t>
+            </a:r>
+          </a:p>
+        </p:txBody>
+      </p:sp>
+      <p:sp>
+        <p:nvSpPr>
+          <p:cNvPr id="15" name="Rectangle 14">
+            <a:extLst>
+              <a:ext uri="{FF2B5EF4-FFF2-40B4-BE49-F238E27FC236}">
+                <a16:creationId xmlns:a16="http://schemas.microsoft.com/office/drawing/2014/main" id="{2E6DE7E8-DA0A-1C54-E16C-FE4CED418D3B}"/>
+              </a:ext>
+            </a:extLst>
+          </p:cNvPr>
+          <p:cNvSpPr/>
+          <p:nvPr/>
+        </p:nvSpPr>
+        <p:spPr>
+          <a:xfrm>
+            <a:off x="504827" y="2406370"/>
+            <a:ext cx="1862136" cy="900113"/>
+          </a:xfrm>
+          <a:prstGeom prst="rect">
+            <a:avLst/>
+          </a:prstGeom>
+        </p:spPr>
+        <p:style>
+          <a:lnRef idx="2">
+            <a:schemeClr val="accent1"/>
+          </a:lnRef>
+          <a:fillRef idx="1">
+            <a:schemeClr val="lt1"/>
+          </a:fillRef>
+          <a:effectRef idx="0">
+            <a:schemeClr val="accent1"/>
+          </a:effectRef>
+          <a:fontRef idx="minor">
+            <a:schemeClr val="dk1"/>
+          </a:fontRef>
+        </p:style>
+        <p:txBody>
+          <a:bodyPr rtlCol="0" anchor="ctr"/>
+          <a:lstStyle/>
+          <a:p>
+            <a:pPr algn="ctr"/>
+            <a:r>
+              <a:rPr lang="en-US" noProof="0" dirty="0"/>
+              <a:t>Define analysis/library parameters</a:t>
+            </a:r>
+          </a:p>
+        </p:txBody>
+      </p:sp>
+      <p:cxnSp>
+        <p:nvCxnSpPr>
+          <p:cNvPr id="17" name="Straight Arrow Connector 16">
+            <a:extLst>
+              <a:ext uri="{FF2B5EF4-FFF2-40B4-BE49-F238E27FC236}">
+                <a16:creationId xmlns:a16="http://schemas.microsoft.com/office/drawing/2014/main" id="{339AF95A-896C-FB2C-0B32-32D54E2FCFAF}"/>
+              </a:ext>
+            </a:extLst>
+          </p:cNvPr>
+          <p:cNvCxnSpPr>
+            <a:cxnSpLocks/>
+            <a:stCxn id="15" idx="2"/>
+            <a:endCxn id="18" idx="0"/>
+          </p:cNvCxnSpPr>
+          <p:nvPr/>
+        </p:nvCxnSpPr>
+        <p:spPr>
+          <a:xfrm>
+            <a:off x="1435895" y="3306483"/>
+            <a:ext cx="0" cy="255866"/>
+          </a:xfrm>
+          <a:prstGeom prst="straightConnector1">
+            <a:avLst/>
+          </a:prstGeom>
+          <a:ln>
+            <a:tailEnd type="triangle"/>
+          </a:ln>
+        </p:spPr>
+        <p:style>
+          <a:lnRef idx="2">
+            <a:schemeClr val="accent1"/>
+          </a:lnRef>
+          <a:fillRef idx="0">
+            <a:schemeClr val="accent1"/>
+          </a:fillRef>
+          <a:effectRef idx="1">
+            <a:schemeClr val="accent1"/>
+          </a:effectRef>
+          <a:fontRef idx="minor">
+            <a:schemeClr val="tx1"/>
+          </a:fontRef>
+        </p:style>
+      </p:cxnSp>
+      <p:sp>
+        <p:nvSpPr>
+          <p:cNvPr id="18" name="Rectangle 17">
+            <a:extLst>
+              <a:ext uri="{FF2B5EF4-FFF2-40B4-BE49-F238E27FC236}">
+                <a16:creationId xmlns:a16="http://schemas.microsoft.com/office/drawing/2014/main" id="{554DEA18-3E4A-3699-B4C3-7255104AA955}"/>
+              </a:ext>
+            </a:extLst>
+          </p:cNvPr>
+          <p:cNvSpPr/>
+          <p:nvPr/>
+        </p:nvSpPr>
+        <p:spPr>
+          <a:xfrm>
+            <a:off x="504827" y="3562349"/>
+            <a:ext cx="1862136" cy="481853"/>
+          </a:xfrm>
+          <a:prstGeom prst="rect">
+            <a:avLst/>
+          </a:prstGeom>
+        </p:spPr>
+        <p:style>
+          <a:lnRef idx="2">
+            <a:schemeClr val="accent1"/>
+          </a:lnRef>
+          <a:fillRef idx="1">
+            <a:schemeClr val="lt1"/>
+          </a:fillRef>
+          <a:effectRef idx="0">
+            <a:schemeClr val="accent1"/>
+          </a:effectRef>
+          <a:fontRef idx="minor">
+            <a:schemeClr val="dk1"/>
+          </a:fontRef>
+        </p:style>
+        <p:txBody>
+          <a:bodyPr rtlCol="0" anchor="ctr"/>
+          <a:lstStyle/>
+          <a:p>
+            <a:pPr algn="ctr"/>
+            <a:r>
+              <a:rPr lang="en-US" noProof="0" dirty="0"/>
+              <a:t>Generate library</a:t>
+            </a:r>
+          </a:p>
+        </p:txBody>
+      </p:sp>
+      <p:sp>
+        <p:nvSpPr>
+          <p:cNvPr id="19" name="Rectangle 18">
+            <a:extLst>
+              <a:ext uri="{FF2B5EF4-FFF2-40B4-BE49-F238E27FC236}">
+                <a16:creationId xmlns:a16="http://schemas.microsoft.com/office/drawing/2014/main" id="{8C1F2B5B-9599-D476-1F7F-DDFB91415827}"/>
+              </a:ext>
+            </a:extLst>
+          </p:cNvPr>
+          <p:cNvSpPr/>
+          <p:nvPr/>
+        </p:nvSpPr>
+        <p:spPr>
+          <a:xfrm>
+            <a:off x="3217068" y="2933699"/>
+            <a:ext cx="1862136" cy="628650"/>
+          </a:xfrm>
+          <a:prstGeom prst="rect">
+            <a:avLst/>
+          </a:prstGeom>
+        </p:spPr>
+        <p:style>
+          <a:lnRef idx="2">
+            <a:schemeClr val="accent1"/>
+          </a:lnRef>
+          <a:fillRef idx="1">
+            <a:schemeClr val="lt1"/>
+          </a:fillRef>
+          <a:effectRef idx="0">
+            <a:schemeClr val="accent1"/>
+          </a:effectRef>
+          <a:fontRef idx="minor">
+            <a:schemeClr val="dk1"/>
+          </a:fontRef>
+        </p:style>
+        <p:txBody>
+          <a:bodyPr rtlCol="0" anchor="ctr"/>
+          <a:lstStyle/>
+          <a:p>
+            <a:pPr algn="ctr"/>
+            <a:r>
+              <a:rPr lang="en-US" noProof="0" dirty="0"/>
+              <a:t>Spatial crop and </a:t>
+            </a:r>
+            <a:r>
+              <a:rPr lang="en-US" noProof="0" dirty="0" err="1"/>
+              <a:t>downsample</a:t>
+            </a:r>
+            <a:endParaRPr lang="en-US" noProof="0" dirty="0"/>
+          </a:p>
+        </p:txBody>
+      </p:sp>
+      <p:cxnSp>
+        <p:nvCxnSpPr>
+          <p:cNvPr id="21" name="Straight Arrow Connector 20">
+            <a:extLst>
+              <a:ext uri="{FF2B5EF4-FFF2-40B4-BE49-F238E27FC236}">
+                <a16:creationId xmlns:a16="http://schemas.microsoft.com/office/drawing/2014/main" id="{91992F3E-6AF6-9DB0-DD54-9D1C6F30B598}"/>
+              </a:ext>
+            </a:extLst>
+          </p:cNvPr>
+          <p:cNvCxnSpPr>
+            <a:stCxn id="15" idx="3"/>
+            <a:endCxn id="19" idx="1"/>
+          </p:cNvCxnSpPr>
+          <p:nvPr/>
+        </p:nvCxnSpPr>
+        <p:spPr>
+          <a:xfrm>
+            <a:off x="2366963" y="2856427"/>
+            <a:ext cx="850105" cy="391597"/>
+          </a:xfrm>
+          <a:prstGeom prst="straightConnector1">
+            <a:avLst/>
+          </a:prstGeom>
+          <a:ln>
+            <a:tailEnd type="triangle"/>
+          </a:ln>
+        </p:spPr>
+        <p:style>
+          <a:lnRef idx="2">
+            <a:schemeClr val="accent1"/>
+          </a:lnRef>
+          <a:fillRef idx="0">
+            <a:schemeClr val="accent1"/>
+          </a:fillRef>
+          <a:effectRef idx="1">
+            <a:schemeClr val="accent1"/>
+          </a:effectRef>
+          <a:fontRef idx="minor">
+            <a:schemeClr val="tx1"/>
+          </a:fontRef>
+        </p:style>
+      </p:cxnSp>
+      <p:sp>
+        <p:nvSpPr>
+          <p:cNvPr id="25" name="Rectangle 24">
+            <a:extLst>
+              <a:ext uri="{FF2B5EF4-FFF2-40B4-BE49-F238E27FC236}">
+                <a16:creationId xmlns:a16="http://schemas.microsoft.com/office/drawing/2014/main" id="{A9DC21DA-03EC-BE95-7719-05DBF5E70B88}"/>
+              </a:ext>
+            </a:extLst>
+          </p:cNvPr>
+          <p:cNvSpPr/>
+          <p:nvPr/>
+        </p:nvSpPr>
+        <p:spPr>
+          <a:xfrm>
+            <a:off x="3217068" y="3817562"/>
+            <a:ext cx="1862136" cy="628650"/>
+          </a:xfrm>
+          <a:prstGeom prst="rect">
+            <a:avLst/>
+          </a:prstGeom>
+        </p:spPr>
+        <p:style>
+          <a:lnRef idx="2">
+            <a:schemeClr val="accent1"/>
+          </a:lnRef>
+          <a:fillRef idx="1">
+            <a:schemeClr val="lt1"/>
+          </a:fillRef>
+          <a:effectRef idx="0">
+            <a:schemeClr val="accent1"/>
+          </a:effectRef>
+          <a:fontRef idx="minor">
+            <a:schemeClr val="dk1"/>
+          </a:fontRef>
+        </p:style>
+        <p:txBody>
+          <a:bodyPr rtlCol="0" anchor="ctr"/>
+          <a:lstStyle/>
+          <a:p>
+            <a:pPr algn="ctr"/>
+            <a:r>
+              <a:rPr lang="en-US" noProof="0" dirty="0"/>
+              <a:t>Gabor decompose</a:t>
+            </a:r>
+          </a:p>
+        </p:txBody>
+      </p:sp>
+      <p:cxnSp>
+        <p:nvCxnSpPr>
+          <p:cNvPr id="27" name="Straight Arrow Connector 26">
+            <a:extLst>
+              <a:ext uri="{FF2B5EF4-FFF2-40B4-BE49-F238E27FC236}">
+                <a16:creationId xmlns:a16="http://schemas.microsoft.com/office/drawing/2014/main" id="{07D317E6-DFD0-C3B3-854E-48681E623ADF}"/>
+              </a:ext>
+            </a:extLst>
+          </p:cNvPr>
+          <p:cNvCxnSpPr>
+            <a:stCxn id="19" idx="2"/>
+            <a:endCxn id="25" idx="0"/>
+          </p:cNvCxnSpPr>
+          <p:nvPr/>
+        </p:nvCxnSpPr>
+        <p:spPr>
+          <a:xfrm>
+            <a:off x="4148136" y="3562349"/>
+            <a:ext cx="0" cy="255213"/>
+          </a:xfrm>
+          <a:prstGeom prst="straightConnector1">
+            <a:avLst/>
+          </a:prstGeom>
+          <a:ln>
+            <a:tailEnd type="triangle"/>
+          </a:ln>
+        </p:spPr>
+        <p:style>
+          <a:lnRef idx="2">
+            <a:schemeClr val="accent1"/>
+          </a:lnRef>
+          <a:fillRef idx="0">
+            <a:schemeClr val="accent1"/>
+          </a:fillRef>
+          <a:effectRef idx="1">
+            <a:schemeClr val="accent1"/>
+          </a:effectRef>
+          <a:fontRef idx="minor">
+            <a:schemeClr val="tx1"/>
+          </a:fontRef>
+        </p:style>
+      </p:cxnSp>
+      <p:cxnSp>
+        <p:nvCxnSpPr>
+          <p:cNvPr id="30" name="Straight Arrow Connector 29">
+            <a:extLst>
+              <a:ext uri="{FF2B5EF4-FFF2-40B4-BE49-F238E27FC236}">
+                <a16:creationId xmlns:a16="http://schemas.microsoft.com/office/drawing/2014/main" id="{9F6FB629-C894-4163-072E-4E8BDA300E42}"/>
+              </a:ext>
+            </a:extLst>
+          </p:cNvPr>
+          <p:cNvCxnSpPr>
+            <a:stCxn id="18" idx="3"/>
+            <a:endCxn id="25" idx="1"/>
+          </p:cNvCxnSpPr>
+          <p:nvPr/>
+        </p:nvCxnSpPr>
+        <p:spPr>
+          <a:xfrm>
+            <a:off x="2366963" y="3803276"/>
+            <a:ext cx="850105" cy="328611"/>
+          </a:xfrm>
+          <a:prstGeom prst="straightConnector1">
+            <a:avLst/>
+          </a:prstGeom>
+          <a:ln>
+            <a:tailEnd type="triangle"/>
+          </a:ln>
+        </p:spPr>
+        <p:style>
+          <a:lnRef idx="2">
+            <a:schemeClr val="accent1"/>
+          </a:lnRef>
+          <a:fillRef idx="0">
+            <a:schemeClr val="accent1"/>
+          </a:fillRef>
+          <a:effectRef idx="1">
+            <a:schemeClr val="accent1"/>
+          </a:effectRef>
+          <a:fontRef idx="minor">
+            <a:schemeClr val="tx1"/>
+          </a:fontRef>
+        </p:style>
+      </p:cxnSp>
+      <p:sp>
+        <p:nvSpPr>
+          <p:cNvPr id="33" name="Rectangle 32">
+            <a:extLst>
+              <a:ext uri="{FF2B5EF4-FFF2-40B4-BE49-F238E27FC236}">
+                <a16:creationId xmlns:a16="http://schemas.microsoft.com/office/drawing/2014/main" id="{DF53E736-58D2-7171-242E-A1479F71F859}"/>
+              </a:ext>
+            </a:extLst>
+          </p:cNvPr>
+          <p:cNvSpPr/>
+          <p:nvPr/>
+        </p:nvSpPr>
+        <p:spPr>
+          <a:xfrm>
+            <a:off x="7327107" y="3749440"/>
+            <a:ext cx="1862136" cy="868319"/>
+          </a:xfrm>
+          <a:prstGeom prst="rect">
+            <a:avLst/>
+          </a:prstGeom>
+        </p:spPr>
+        <p:style>
+          <a:lnRef idx="2">
+            <a:schemeClr val="accent1"/>
+          </a:lnRef>
+          <a:fillRef idx="1">
+            <a:schemeClr val="lt1"/>
+          </a:fillRef>
+          <a:effectRef idx="0">
+            <a:schemeClr val="accent1"/>
+          </a:effectRef>
+          <a:fontRef idx="minor">
+            <a:schemeClr val="dk1"/>
+          </a:fontRef>
+        </p:style>
+        <p:txBody>
+          <a:bodyPr rtlCol="0" anchor="ctr"/>
+          <a:lstStyle/>
+          <a:p>
+            <a:pPr algn="ctr"/>
+            <a:r>
+              <a:rPr lang="en-US" noProof="0" dirty="0"/>
+              <a:t>Correlate and calculate tuning curves</a:t>
+            </a:r>
+          </a:p>
+        </p:txBody>
+      </p:sp>
+      <p:cxnSp>
+        <p:nvCxnSpPr>
+          <p:cNvPr id="36" name="Straight Arrow Connector 35">
+            <a:extLst>
+              <a:ext uri="{FF2B5EF4-FFF2-40B4-BE49-F238E27FC236}">
+                <a16:creationId xmlns:a16="http://schemas.microsoft.com/office/drawing/2014/main" id="{6F58F1BC-F1E6-695E-C05E-5DC48240D051}"/>
+              </a:ext>
+            </a:extLst>
+          </p:cNvPr>
+          <p:cNvCxnSpPr>
+            <a:stCxn id="25" idx="3"/>
+            <a:endCxn id="33" idx="1"/>
+          </p:cNvCxnSpPr>
+          <p:nvPr/>
+        </p:nvCxnSpPr>
+        <p:spPr>
+          <a:xfrm>
+            <a:off x="5079204" y="4131887"/>
+            <a:ext cx="2247903" cy="51713"/>
+          </a:xfrm>
+          <a:prstGeom prst="straightConnector1">
+            <a:avLst/>
+          </a:prstGeom>
+          <a:ln>
+            <a:tailEnd type="triangle"/>
+          </a:ln>
+        </p:spPr>
+        <p:style>
+          <a:lnRef idx="2">
+            <a:schemeClr val="accent1"/>
+          </a:lnRef>
+          <a:fillRef idx="0">
+            <a:schemeClr val="accent1"/>
+          </a:fillRef>
+          <a:effectRef idx="1">
+            <a:schemeClr val="accent1"/>
+          </a:effectRef>
+          <a:fontRef idx="minor">
+            <a:schemeClr val="tx1"/>
+          </a:fontRef>
+        </p:style>
+      </p:cxnSp>
+      <p:sp>
+        <p:nvSpPr>
+          <p:cNvPr id="39" name="Rectangle 38">
+            <a:extLst>
+              <a:ext uri="{FF2B5EF4-FFF2-40B4-BE49-F238E27FC236}">
+                <a16:creationId xmlns:a16="http://schemas.microsoft.com/office/drawing/2014/main" id="{2CC264D2-9BCC-D57D-7A49-B47BC15D86D2}"/>
+              </a:ext>
+            </a:extLst>
+          </p:cNvPr>
+          <p:cNvSpPr/>
+          <p:nvPr/>
+        </p:nvSpPr>
+        <p:spPr>
+          <a:xfrm>
+            <a:off x="7327107" y="4897446"/>
+            <a:ext cx="1862136" cy="868319"/>
+          </a:xfrm>
+          <a:prstGeom prst="rect">
+            <a:avLst/>
+          </a:prstGeom>
+        </p:spPr>
+        <p:style>
+          <a:lnRef idx="2">
+            <a:schemeClr val="accent1"/>
+          </a:lnRef>
+          <a:fillRef idx="1">
+            <a:schemeClr val="lt1"/>
+          </a:fillRef>
+          <a:effectRef idx="0">
+            <a:schemeClr val="accent1"/>
+          </a:effectRef>
+          <a:fontRef idx="minor">
+            <a:schemeClr val="dk1"/>
+          </a:fontRef>
+        </p:style>
+        <p:txBody>
+          <a:bodyPr rtlCol="0" anchor="ctr"/>
+          <a:lstStyle/>
+          <a:p>
+            <a:pPr algn="ctr"/>
+            <a:r>
+              <a:rPr lang="en-US" noProof="0" dirty="0"/>
+              <a:t>Display and verify</a:t>
+            </a:r>
+          </a:p>
+        </p:txBody>
+      </p:sp>
+      <p:cxnSp>
+        <p:nvCxnSpPr>
+          <p:cNvPr id="41" name="Straight Arrow Connector 40">
+            <a:extLst>
+              <a:ext uri="{FF2B5EF4-FFF2-40B4-BE49-F238E27FC236}">
+                <a16:creationId xmlns:a16="http://schemas.microsoft.com/office/drawing/2014/main" id="{16E00EF4-1077-FF70-3EC7-E77CDF821746}"/>
+              </a:ext>
+            </a:extLst>
+          </p:cNvPr>
+          <p:cNvCxnSpPr>
+            <a:stCxn id="33" idx="2"/>
+            <a:endCxn id="39" idx="0"/>
+          </p:cNvCxnSpPr>
+          <p:nvPr/>
+        </p:nvCxnSpPr>
+        <p:spPr>
+          <a:xfrm>
+            <a:off x="8258175" y="4617759"/>
+            <a:ext cx="0" cy="279687"/>
+          </a:xfrm>
+          <a:prstGeom prst="straightConnector1">
+            <a:avLst/>
+          </a:prstGeom>
+          <a:ln>
+            <a:tailEnd type="triangle"/>
+          </a:ln>
+        </p:spPr>
+        <p:style>
+          <a:lnRef idx="2">
+            <a:schemeClr val="accent1"/>
+          </a:lnRef>
+          <a:fillRef idx="0">
+            <a:schemeClr val="accent1"/>
+          </a:fillRef>
+          <a:effectRef idx="1">
+            <a:schemeClr val="accent1"/>
+          </a:effectRef>
+          <a:fontRef idx="minor">
+            <a:schemeClr val="tx1"/>
+          </a:fontRef>
+        </p:style>
+      </p:cxnSp>
+      <p:sp>
+        <p:nvSpPr>
+          <p:cNvPr id="45" name="Right Brace 44">
+            <a:extLst>
+              <a:ext uri="{FF2B5EF4-FFF2-40B4-BE49-F238E27FC236}">
+                <a16:creationId xmlns:a16="http://schemas.microsoft.com/office/drawing/2014/main" id="{0D6E71F7-3A8C-CF5F-0F6A-6D39478794AC}"/>
+              </a:ext>
+            </a:extLst>
+          </p:cNvPr>
+          <p:cNvSpPr/>
+          <p:nvPr/>
+        </p:nvSpPr>
+        <p:spPr>
+          <a:xfrm rot="5400000">
+            <a:off x="2713433" y="4346076"/>
+            <a:ext cx="352425" cy="4102892"/>
+          </a:xfrm>
+          <a:prstGeom prst="rightBrace">
+            <a:avLst/>
+          </a:prstGeom>
+          <a:ln>
+            <a:solidFill>
+              <a:schemeClr val="bg1">
+                <a:lumMod val="50000"/>
+              </a:schemeClr>
+            </a:solidFill>
+          </a:ln>
+        </p:spPr>
+        <p:style>
+          <a:lnRef idx="2">
+            <a:schemeClr val="accent1"/>
+          </a:lnRef>
+          <a:fillRef idx="0">
+            <a:schemeClr val="accent1"/>
+          </a:fillRef>
+          <a:effectRef idx="1">
+            <a:schemeClr val="accent1"/>
+          </a:effectRef>
+          <a:fontRef idx="minor">
+            <a:schemeClr val="tx1"/>
+          </a:fontRef>
+        </p:style>
+        <p:txBody>
+          <a:bodyPr rtlCol="0" anchor="ctr"/>
+          <a:lstStyle/>
+          <a:p>
+            <a:pPr algn="ctr"/>
+            <a:endParaRPr lang="en-US" noProof="0" dirty="0">
+              <a:solidFill>
+                <a:schemeClr val="tx1">
+                  <a:lumMod val="65000"/>
+                  <a:lumOff val="35000"/>
+                </a:schemeClr>
+              </a:solidFill>
+            </a:endParaRPr>
+          </a:p>
+        </p:txBody>
+      </p:sp>
+      <p:sp>
+        <p:nvSpPr>
+          <p:cNvPr id="46" name="TextBox 45">
+            <a:extLst>
+              <a:ext uri="{FF2B5EF4-FFF2-40B4-BE49-F238E27FC236}">
+                <a16:creationId xmlns:a16="http://schemas.microsoft.com/office/drawing/2014/main" id="{A03B0952-491C-D719-8173-FE720A6BA147}"/>
+              </a:ext>
+            </a:extLst>
+          </p:cNvPr>
+          <p:cNvSpPr txBox="1"/>
+          <p:nvPr/>
+        </p:nvSpPr>
+        <p:spPr>
+          <a:xfrm>
+            <a:off x="1728245" y="6488668"/>
+            <a:ext cx="2518062" cy="369332"/>
+          </a:xfrm>
+          <a:prstGeom prst="rect">
+            <a:avLst/>
+          </a:prstGeom>
+          <a:noFill/>
+          <a:ln>
+            <a:solidFill>
+              <a:schemeClr val="bg1">
+                <a:lumMod val="50000"/>
+              </a:schemeClr>
+            </a:solidFill>
+          </a:ln>
+        </p:spPr>
+        <p:txBody>
+          <a:bodyPr wrap="none" rtlCol="0">
+            <a:spAutoFit/>
+          </a:bodyPr>
+          <a:lstStyle/>
+          <a:p>
+            <a:r>
+              <a:rPr lang="en-US" noProof="0" dirty="0">
                 <a:solidFill>
                   <a:schemeClr val="tx1">
                     <a:lumMod val="65000"/>
@@ -4798,10 +5796,106 @@
                   </a:schemeClr>
                 </a:solidFill>
               </a:rPr>
-              <a:t> per </a:t>
-            </a:r>
-            <a:r>
-              <a:rPr lang="hu-HU" dirty="0" err="1">
+              <a:t>Run and store per video</a:t>
+            </a:r>
+          </a:p>
+        </p:txBody>
+      </p:sp>
+      <p:sp>
+        <p:nvSpPr>
+          <p:cNvPr id="47" name="Right Brace 46">
+            <a:extLst>
+              <a:ext uri="{FF2B5EF4-FFF2-40B4-BE49-F238E27FC236}">
+                <a16:creationId xmlns:a16="http://schemas.microsoft.com/office/drawing/2014/main" id="{2F768105-EB4F-BFDC-E124-5474A806AE19}"/>
+              </a:ext>
+            </a:extLst>
+          </p:cNvPr>
+          <p:cNvSpPr/>
+          <p:nvPr/>
+        </p:nvSpPr>
+        <p:spPr>
+          <a:xfrm rot="5400000">
+            <a:off x="8054578" y="5358210"/>
+            <a:ext cx="352425" cy="1916904"/>
+          </a:xfrm>
+          <a:prstGeom prst="rightBrace">
+            <a:avLst/>
+          </a:prstGeom>
+          <a:ln>
+            <a:solidFill>
+              <a:schemeClr val="bg1">
+                <a:lumMod val="50000"/>
+              </a:schemeClr>
+            </a:solidFill>
+          </a:ln>
+        </p:spPr>
+        <p:style>
+          <a:lnRef idx="2">
+            <a:schemeClr val="accent1"/>
+          </a:lnRef>
+          <a:fillRef idx="0">
+            <a:schemeClr val="accent1"/>
+          </a:fillRef>
+          <a:effectRef idx="1">
+            <a:schemeClr val="accent1"/>
+          </a:effectRef>
+          <a:fontRef idx="minor">
+            <a:schemeClr val="tx1"/>
+          </a:fontRef>
+        </p:style>
+        <p:txBody>
+          <a:bodyPr rtlCol="0" anchor="ctr"/>
+          <a:lstStyle/>
+          <a:p>
+            <a:pPr algn="ctr"/>
+            <a:endParaRPr lang="en-US" noProof="0" dirty="0">
+              <a:solidFill>
+                <a:schemeClr val="tx1">
+                  <a:lumMod val="65000"/>
+                  <a:lumOff val="35000"/>
+                </a:schemeClr>
+              </a:solidFill>
+            </a:endParaRPr>
+          </a:p>
+        </p:txBody>
+      </p:sp>
+      <p:sp>
+        <p:nvSpPr>
+          <p:cNvPr id="48" name="TextBox 47">
+            <a:extLst>
+              <a:ext uri="{FF2B5EF4-FFF2-40B4-BE49-F238E27FC236}">
+                <a16:creationId xmlns:a16="http://schemas.microsoft.com/office/drawing/2014/main" id="{BFCE1EAF-070A-21BC-986C-6F5C3B775333}"/>
+              </a:ext>
+            </a:extLst>
+          </p:cNvPr>
+          <p:cNvSpPr txBox="1"/>
+          <p:nvPr/>
+        </p:nvSpPr>
+        <p:spPr>
+          <a:xfrm>
+            <a:off x="7147970" y="6485450"/>
+            <a:ext cx="2400337" cy="369332"/>
+          </a:xfrm>
+          <a:prstGeom prst="rect">
+            <a:avLst/>
+          </a:prstGeom>
+          <a:noFill/>
+          <a:ln>
+            <a:solidFill>
+              <a:schemeClr val="bg1">
+                <a:lumMod val="50000"/>
+              </a:schemeClr>
+            </a:solidFill>
+          </a:ln>
+        </p:spPr>
+        <p:txBody>
+          <a:bodyPr wrap="none" rtlCol="0">
+            <a:spAutoFit/>
+          </a:bodyPr>
+          <a:lstStyle/>
+          <a:p>
+            <a:r>
+              <a:rPr lang="en-US" noProof="0" dirty="0">
                 <a:solidFill>
                   <a:schemeClr val="tx1">
                     <a:lumMod val="65000"/>
@@ -4809,23 +5903,194 @@
                   </a:schemeClr>
                 </a:solidFill>
               </a:rPr>
-              <a:t>measurement</a:t>
-            </a:r>
-            <a:endParaRPr lang="hu-HU" dirty="0">
-              <a:solidFill>
-                <a:schemeClr val="tx1">
-                  <a:lumMod val="65000"/>
-                  <a:lumOff val="35000"/>
-                </a:schemeClr>
-              </a:solidFill>
-            </a:endParaRPr>
-          </a:p>
-        </p:txBody>
-      </p:sp>
+              <a:t>Run per measurement</a:t>
+            </a:r>
+          </a:p>
+        </p:txBody>
+      </p:sp>
+      <p:sp>
+        <p:nvSpPr>
+          <p:cNvPr id="6" name="TextBox 5">
+            <a:extLst>
+              <a:ext uri="{FF2B5EF4-FFF2-40B4-BE49-F238E27FC236}">
+                <a16:creationId xmlns:a16="http://schemas.microsoft.com/office/drawing/2014/main" id="{F79063EB-1396-27BF-8114-C890ECAF9CF5}"/>
+              </a:ext>
+            </a:extLst>
+          </p:cNvPr>
+          <p:cNvSpPr txBox="1"/>
+          <p:nvPr/>
+        </p:nvSpPr>
+        <p:spPr>
+          <a:xfrm>
+            <a:off x="0" y="3248379"/>
+            <a:ext cx="2152649" cy="276999"/>
+          </a:xfrm>
+          <a:prstGeom prst="rect">
+            <a:avLst/>
+          </a:prstGeom>
+          <a:noFill/>
+        </p:spPr>
+        <p:txBody>
+          <a:bodyPr wrap="square">
+            <a:spAutoFit/>
+          </a:bodyPr>
+          <a:lstStyle/>
+          <a:p>
+            <a:r>
+              <a:rPr lang="en-US" sz="1200" dirty="0"/>
+              <a:t>S1_gabor_test_vS.ipynb</a:t>
+            </a:r>
+            <a:endParaRPr lang="hu-HU" sz="1200" dirty="0"/>
+          </a:p>
+        </p:txBody>
+      </p:sp>
+      <p:sp>
+        <p:nvSpPr>
+          <p:cNvPr id="9" name="TextBox 8">
+            <a:extLst>
+              <a:ext uri="{FF2B5EF4-FFF2-40B4-BE49-F238E27FC236}">
+                <a16:creationId xmlns:a16="http://schemas.microsoft.com/office/drawing/2014/main" id="{F29F08CF-84F7-7376-1FFA-FB47B5C2AE1E}"/>
+              </a:ext>
+            </a:extLst>
+          </p:cNvPr>
+          <p:cNvSpPr txBox="1"/>
+          <p:nvPr/>
+        </p:nvSpPr>
+        <p:spPr>
+          <a:xfrm>
+            <a:off x="-1" y="4042118"/>
+            <a:ext cx="2686051" cy="276999"/>
+          </a:xfrm>
+          <a:prstGeom prst="rect">
+            <a:avLst/>
+          </a:prstGeom>
+          <a:noFill/>
+        </p:spPr>
+        <p:txBody>
+          <a:bodyPr wrap="square">
+            <a:spAutoFit/>
+          </a:bodyPr>
+          <a:lstStyle/>
+          <a:p>
+            <a:r>
+              <a:rPr lang="en-US" sz="1200" strike="sngStrike" dirty="0"/>
+              <a:t>S2_gabor_library_generation_vS.ipynb</a:t>
+            </a:r>
+            <a:endParaRPr lang="hu-HU" sz="1200" strike="sngStrike" dirty="0"/>
+          </a:p>
+        </p:txBody>
+      </p:sp>
+      <p:sp>
+        <p:nvSpPr>
+          <p:cNvPr id="14" name="TextBox 13">
+            <a:extLst>
+              <a:ext uri="{FF2B5EF4-FFF2-40B4-BE49-F238E27FC236}">
+                <a16:creationId xmlns:a16="http://schemas.microsoft.com/office/drawing/2014/main" id="{EB1ED34E-3A3A-02A6-32BF-AB3C32E79F28}"/>
+              </a:ext>
+            </a:extLst>
+          </p:cNvPr>
+          <p:cNvSpPr txBox="1"/>
+          <p:nvPr/>
+        </p:nvSpPr>
+        <p:spPr>
+          <a:xfrm>
+            <a:off x="3452307" y="4501215"/>
+            <a:ext cx="2329368" cy="261610"/>
+          </a:xfrm>
+          <a:prstGeom prst="rect">
+            <a:avLst/>
+          </a:prstGeom>
+          <a:noFill/>
+        </p:spPr>
+        <p:txBody>
+          <a:bodyPr wrap="square">
+            <a:spAutoFit/>
+          </a:bodyPr>
+          <a:lstStyle/>
+          <a:p>
+            <a:r>
+              <a:rPr lang="hu-HU" sz="1100" dirty="0"/>
+              <a:t>S3_video_decomposition_vS.ipynb</a:t>
+            </a:r>
+          </a:p>
+        </p:txBody>
+      </p:sp>
+      <p:sp>
+        <p:nvSpPr>
+          <p:cNvPr id="20" name="TextBox 19">
+            <a:extLst>
+              <a:ext uri="{FF2B5EF4-FFF2-40B4-BE49-F238E27FC236}">
+                <a16:creationId xmlns:a16="http://schemas.microsoft.com/office/drawing/2014/main" id="{59396CA1-F93D-26FD-9E28-FCAF3E031BF0}"/>
+              </a:ext>
+            </a:extLst>
+          </p:cNvPr>
+          <p:cNvSpPr txBox="1"/>
+          <p:nvPr/>
+        </p:nvSpPr>
+        <p:spPr>
+          <a:xfrm>
+            <a:off x="9189243" y="4042118"/>
+            <a:ext cx="2897982" cy="430887"/>
+          </a:xfrm>
+          <a:prstGeom prst="rect">
+            <a:avLst/>
+          </a:prstGeom>
+          <a:noFill/>
+        </p:spPr>
+        <p:txBody>
+          <a:bodyPr wrap="square">
+            <a:spAutoFit/>
+          </a:bodyPr>
+          <a:lstStyle/>
+          <a:p>
+            <a:r>
+              <a:rPr lang="en-US" sz="1100" dirty="0"/>
+              <a:t>S4_simple_feature_estimation_test_vS.ipynb S5_complex_feature_estimation_vS.ipynb</a:t>
+            </a:r>
+            <a:endParaRPr lang="hu-HU" sz="1100" dirty="0"/>
+          </a:p>
+        </p:txBody>
+      </p:sp>
+      <p:cxnSp>
+        <p:nvCxnSpPr>
+          <p:cNvPr id="10" name="Straight Connector 9">
+            <a:extLst>
+              <a:ext uri="{FF2B5EF4-FFF2-40B4-BE49-F238E27FC236}">
+                <a16:creationId xmlns:a16="http://schemas.microsoft.com/office/drawing/2014/main" id="{9C13467E-4569-DACA-7CEB-64BB079D8E2D}"/>
+              </a:ext>
+            </a:extLst>
+          </p:cNvPr>
+          <p:cNvCxnSpPr/>
+          <p:nvPr/>
+        </p:nvCxnSpPr>
+        <p:spPr>
+          <a:xfrm flipV="1">
+            <a:off x="504827" y="3562349"/>
+            <a:ext cx="1862136" cy="479769"/>
+          </a:xfrm>
+          <a:prstGeom prst="line">
+            <a:avLst/>
+          </a:prstGeom>
+        </p:spPr>
+        <p:style>
+          <a:lnRef idx="2">
+            <a:schemeClr val="accent1"/>
+          </a:lnRef>
+          <a:fillRef idx="0">
+            <a:schemeClr val="accent1"/>
+          </a:fillRef>
+          <a:effectRef idx="1">
+            <a:schemeClr val="accent1"/>
+          </a:effectRef>
+          <a:fontRef idx="minor">
+            <a:schemeClr val="tx1"/>
+          </a:fontRef>
+        </p:style>
+      </p:cxnSp>
     </p:spTree>
     <p:extLst>
       <p:ext uri="{BB962C8B-B14F-4D97-AF65-F5344CB8AC3E}">
-        <p14:creationId xmlns:p14="http://schemas.microsoft.com/office/powerpoint/2010/main" val="24788606"/>
+        <p14:creationId xmlns:p14="http://schemas.microsoft.com/office/powerpoint/2010/main" val="686932972"/>
       </p:ext>
     </p:extLst>
   </p:cSld>
